--- a/final/final-presentation.pptx
+++ b/final/final-presentation.pptx
@@ -5778,8 +5778,8 @@
         </p:nvSpPr>
         <p:spPr>
           <a:xfrm rot="0">
-            <a:off x="1171824" y="4896567"/>
-            <a:ext cx="4844301" cy="1976120"/>
+            <a:off x="7757269" y="1715514"/>
+            <a:ext cx="8755099" cy="1023620"/>
           </a:xfrm>
           <a:prstGeom prst="rect">
             <a:avLst/>
@@ -5800,7 +5800,7 @@
               </a:spcBef>
             </a:pPr>
             <a:r>
-              <a:rPr lang="en-US" b="true" sz="6500" spc="-656">
+              <a:rPr lang="en-US" b="true" sz="6500" spc="-58">
                 <a:solidFill>
                   <a:srgbClr val="191919"/>
                 </a:solidFill>
@@ -5812,7 +5812,7 @@
               <a:t>H1: Skill Predicts</a:t>
             </a:r>
             <a:r>
-              <a:rPr lang="en-US" b="true" sz="6500" spc="-656">
+              <a:rPr lang="en-US" b="true" sz="6500" spc="-58">
                 <a:solidFill>
                   <a:srgbClr val="191919"/>
                 </a:solidFill>
@@ -5826,16 +5826,216 @@
           </a:p>
         </p:txBody>
       </p:sp>
-      <p:sp>
-        <p:nvSpPr>
-          <p:cNvPr name="TextBox 4" id="4"/>
+      <p:grpSp>
+        <p:nvGrpSpPr>
+          <p:cNvPr name="Group 4" id="4"/>
+          <p:cNvGrpSpPr/>
+          <p:nvPr/>
+        </p:nvGrpSpPr>
+        <p:grpSpPr>
+          <a:xfrm rot="0">
+            <a:off x="2985864" y="1542000"/>
+            <a:ext cx="2048449" cy="2048449"/>
+            <a:chOff x="0" y="0"/>
+            <a:chExt cx="812800" cy="812800"/>
+          </a:xfrm>
+        </p:grpSpPr>
+        <p:sp>
+          <p:nvSpPr>
+            <p:cNvPr name="Freeform 5" id="5"/>
+            <p:cNvSpPr/>
+            <p:nvPr/>
+          </p:nvSpPr>
+          <p:spPr>
+            <a:xfrm flipH="false" flipV="false" rot="0">
+              <a:off x="0" y="0"/>
+              <a:ext cx="812800" cy="812800"/>
+            </a:xfrm>
+            <a:custGeom>
+              <a:avLst/>
+              <a:gdLst/>
+              <a:ahLst/>
+              <a:cxnLst/>
+              <a:rect r="r" b="b" t="t" l="l"/>
+              <a:pathLst>
+                <a:path h="812800" w="812800">
+                  <a:moveTo>
+                    <a:pt x="406400" y="0"/>
+                  </a:moveTo>
+                  <a:cubicBezTo>
+                    <a:pt x="181951" y="0"/>
+                    <a:pt x="0" y="181951"/>
+                    <a:pt x="0" y="406400"/>
+                  </a:cubicBezTo>
+                  <a:cubicBezTo>
+                    <a:pt x="0" y="630849"/>
+                    <a:pt x="181951" y="812800"/>
+                    <a:pt x="406400" y="812800"/>
+                  </a:cubicBezTo>
+                  <a:cubicBezTo>
+                    <a:pt x="630849" y="812800"/>
+                    <a:pt x="812800" y="630849"/>
+                    <a:pt x="812800" y="406400"/>
+                  </a:cubicBezTo>
+                  <a:cubicBezTo>
+                    <a:pt x="812800" y="181951"/>
+                    <a:pt x="630849" y="0"/>
+                    <a:pt x="406400" y="0"/>
+                  </a:cubicBezTo>
+                  <a:close/>
+                </a:path>
+              </a:pathLst>
+            </a:custGeom>
+            <a:solidFill>
+              <a:srgbClr val="F4F4F4"/>
+            </a:solidFill>
+            <a:ln w="19050" cap="sq">
+              <a:solidFill>
+                <a:srgbClr val="000000"/>
+              </a:solidFill>
+              <a:prstDash val="solid"/>
+              <a:miter/>
+            </a:ln>
+          </p:spPr>
+        </p:sp>
+        <p:sp>
+          <p:nvSpPr>
+            <p:cNvPr name="TextBox 6" id="6"/>
+            <p:cNvSpPr txBox="true"/>
+            <p:nvPr/>
+          </p:nvSpPr>
+          <p:spPr>
+            <a:xfrm>
+              <a:off x="76200" y="57150"/>
+              <a:ext cx="660400" cy="679450"/>
+            </a:xfrm>
+            <a:prstGeom prst="rect">
+              <a:avLst/>
+            </a:prstGeom>
+          </p:spPr>
+          <p:txBody>
+            <a:bodyPr anchor="ctr" rtlCol="false" tIns="50800" lIns="50800" bIns="50800" rIns="50800"/>
+            <a:lstStyle/>
+            <a:p>
+              <a:pPr algn="ctr">
+                <a:lnSpc>
+                  <a:spcPts val="1679"/>
+                </a:lnSpc>
+              </a:pPr>
+            </a:p>
+          </p:txBody>
+        </p:sp>
+      </p:grpSp>
+      <p:grpSp>
+        <p:nvGrpSpPr>
+          <p:cNvPr name="Group 7" id="7"/>
+          <p:cNvGrpSpPr/>
+          <p:nvPr/>
+        </p:nvGrpSpPr>
+        <p:grpSpPr>
+          <a:xfrm rot="0">
+            <a:off x="2985864" y="4009549"/>
+            <a:ext cx="2048449" cy="2048449"/>
+            <a:chOff x="0" y="0"/>
+            <a:chExt cx="812800" cy="812800"/>
+          </a:xfrm>
+        </p:grpSpPr>
+        <p:sp>
+          <p:nvSpPr>
+            <p:cNvPr name="Freeform 8" id="8"/>
+            <p:cNvSpPr/>
+            <p:nvPr/>
+          </p:nvSpPr>
+          <p:spPr>
+            <a:xfrm flipH="false" flipV="false" rot="0">
+              <a:off x="0" y="0"/>
+              <a:ext cx="812800" cy="812800"/>
+            </a:xfrm>
+            <a:custGeom>
+              <a:avLst/>
+              <a:gdLst/>
+              <a:ahLst/>
+              <a:cxnLst/>
+              <a:rect r="r" b="b" t="t" l="l"/>
+              <a:pathLst>
+                <a:path h="812800" w="812800">
+                  <a:moveTo>
+                    <a:pt x="406400" y="0"/>
+                  </a:moveTo>
+                  <a:cubicBezTo>
+                    <a:pt x="181951" y="0"/>
+                    <a:pt x="0" y="181951"/>
+                    <a:pt x="0" y="406400"/>
+                  </a:cubicBezTo>
+                  <a:cubicBezTo>
+                    <a:pt x="0" y="630849"/>
+                    <a:pt x="181951" y="812800"/>
+                    <a:pt x="406400" y="812800"/>
+                  </a:cubicBezTo>
+                  <a:cubicBezTo>
+                    <a:pt x="630849" y="812800"/>
+                    <a:pt x="812800" y="630849"/>
+                    <a:pt x="812800" y="406400"/>
+                  </a:cubicBezTo>
+                  <a:cubicBezTo>
+                    <a:pt x="812800" y="181951"/>
+                    <a:pt x="630849" y="0"/>
+                    <a:pt x="406400" y="0"/>
+                  </a:cubicBezTo>
+                  <a:close/>
+                </a:path>
+              </a:pathLst>
+            </a:custGeom>
+            <a:solidFill>
+              <a:srgbClr val="F4F4F4"/>
+            </a:solidFill>
+            <a:ln w="19050" cap="sq">
+              <a:solidFill>
+                <a:srgbClr val="000000"/>
+              </a:solidFill>
+              <a:prstDash val="solid"/>
+              <a:miter/>
+            </a:ln>
+          </p:spPr>
+        </p:sp>
+        <p:sp>
+          <p:nvSpPr>
+            <p:cNvPr name="TextBox 9" id="9"/>
+            <p:cNvSpPr txBox="true"/>
+            <p:nvPr/>
+          </p:nvSpPr>
+          <p:spPr>
+            <a:xfrm>
+              <a:off x="76200" y="57150"/>
+              <a:ext cx="660400" cy="679450"/>
+            </a:xfrm>
+            <a:prstGeom prst="rect">
+              <a:avLst/>
+            </a:prstGeom>
+          </p:spPr>
+          <p:txBody>
+            <a:bodyPr anchor="ctr" rtlCol="false" tIns="50800" lIns="50800" bIns="50800" rIns="50800"/>
+            <a:lstStyle/>
+            <a:p>
+              <a:pPr algn="ctr">
+                <a:lnSpc>
+                  <a:spcPts val="1679"/>
+                </a:lnSpc>
+              </a:pPr>
+            </a:p>
+          </p:txBody>
+        </p:sp>
+      </p:grpSp>
+      <p:sp>
+        <p:nvSpPr>
+          <p:cNvPr name="TextBox 10" id="10"/>
           <p:cNvSpPr txBox="true"/>
           <p:nvPr/>
         </p:nvSpPr>
         <p:spPr>
           <a:xfrm rot="0">
-            <a:off x="1171824" y="3274695"/>
-            <a:ext cx="4409029" cy="3661410"/>
+            <a:off x="3337204" y="1656714"/>
+            <a:ext cx="1345769" cy="1761871"/>
           </a:xfrm>
           <a:prstGeom prst="rect">
             <a:avLst/>
@@ -5849,14 +6049,14 @@
           <a:p>
             <a:pPr algn="l" marL="0" indent="0" lvl="0">
               <a:lnSpc>
-                <a:spcPts val="13919"/>
+                <a:spcPts val="12991"/>
               </a:lnSpc>
               <a:spcBef>
                 <a:spcPct val="0"/>
               </a:spcBef>
             </a:pPr>
             <a:r>
-              <a:rPr lang="en-US" sz="12000" spc="-552">
+              <a:rPr lang="en-US" sz="11199" spc="-515">
                 <a:solidFill>
                   <a:srgbClr val="191919">
                     <a:alpha val="34902"/>
@@ -5870,28 +6070,18 @@
               <a:t>01</a:t>
             </a:r>
           </a:p>
-          <a:p>
-            <a:pPr algn="l" marL="0" indent="0" lvl="0">
-              <a:lnSpc>
-                <a:spcPts val="13919"/>
-              </a:lnSpc>
-              <a:spcBef>
-                <a:spcPct val="0"/>
-              </a:spcBef>
-            </a:pPr>
-          </a:p>
-        </p:txBody>
-      </p:sp>
-      <p:sp>
-        <p:nvSpPr>
-          <p:cNvPr name="TextBox 5" id="5"/>
+        </p:txBody>
+      </p:sp>
+      <p:sp>
+        <p:nvSpPr>
+          <p:cNvPr name="TextBox 11" id="11"/>
           <p:cNvSpPr txBox="true"/>
           <p:nvPr/>
         </p:nvSpPr>
         <p:spPr>
           <a:xfrm rot="0">
-            <a:off x="1171824" y="7055446"/>
-            <a:ext cx="3750305" cy="438150"/>
+            <a:off x="7762922" y="2828024"/>
+            <a:ext cx="5536992" cy="438150"/>
           </a:xfrm>
           <a:prstGeom prst="rect">
             <a:avLst/>
@@ -5956,14 +6146,14 @@
       </p:sp>
       <p:sp>
         <p:nvSpPr>
-          <p:cNvPr name="TextBox 6" id="6"/>
+          <p:cNvPr name="TextBox 12" id="12"/>
           <p:cNvSpPr txBox="true"/>
           <p:nvPr/>
         </p:nvSpPr>
         <p:spPr>
           <a:xfrm rot="0">
-            <a:off x="6551889" y="4896567"/>
-            <a:ext cx="5327346" cy="2928620"/>
+            <a:off x="7762922" y="3426839"/>
+            <a:ext cx="9050298" cy="1976120"/>
           </a:xfrm>
           <a:prstGeom prst="rect">
             <a:avLst/>
@@ -5975,16 +6165,13 @@
           </a:bodyPr>
           <a:lstStyle/>
           <a:p>
-            <a:pPr algn="l" marL="0" indent="0" lvl="0">
+            <a:pPr algn="l">
               <a:lnSpc>
                 <a:spcPts val="7540"/>
               </a:lnSpc>
-              <a:spcBef>
-                <a:spcPct val="0"/>
-              </a:spcBef>
-            </a:pPr>
-            <a:r>
-              <a:rPr lang="en-US" b="true" sz="6500" spc="-656">
+            </a:pPr>
+            <a:r>
+              <a:rPr lang="en-US" b="true" sz="6500" spc="-58">
                 <a:solidFill>
                   <a:srgbClr val="191919"/>
                 </a:solidFill>
@@ -5993,10 +6180,10 @@
                 <a:cs typeface="Poppins Semi-Bold"/>
                 <a:sym typeface="Poppins Semi-Bold"/>
               </a:rPr>
-              <a:t> H2: History Pre</a:t>
-            </a:r>
-            <a:r>
-              <a:rPr lang="en-US" b="true" sz="6500" spc="-656">
+              <a:t>H2: History Pre</a:t>
+            </a:r>
+            <a:r>
+              <a:rPr lang="en-US" b="true" sz="6500" spc="-58">
                 <a:solidFill>
                   <a:srgbClr val="191919"/>
                 </a:solidFill>
@@ -6010,16 +6197,116 @@
           </a:p>
         </p:txBody>
       </p:sp>
-      <p:sp>
-        <p:nvSpPr>
-          <p:cNvPr name="TextBox 7" id="7"/>
+      <p:grpSp>
+        <p:nvGrpSpPr>
+          <p:cNvPr name="Group 13" id="13"/>
+          <p:cNvGrpSpPr/>
+          <p:nvPr/>
+        </p:nvGrpSpPr>
+        <p:grpSpPr>
+          <a:xfrm rot="0">
+            <a:off x="2985864" y="6252620"/>
+            <a:ext cx="2048449" cy="2048449"/>
+            <a:chOff x="0" y="0"/>
+            <a:chExt cx="812800" cy="812800"/>
+          </a:xfrm>
+        </p:grpSpPr>
+        <p:sp>
+          <p:nvSpPr>
+            <p:cNvPr name="Freeform 14" id="14"/>
+            <p:cNvSpPr/>
+            <p:nvPr/>
+          </p:nvSpPr>
+          <p:spPr>
+            <a:xfrm flipH="false" flipV="false" rot="0">
+              <a:off x="0" y="0"/>
+              <a:ext cx="812800" cy="812800"/>
+            </a:xfrm>
+            <a:custGeom>
+              <a:avLst/>
+              <a:gdLst/>
+              <a:ahLst/>
+              <a:cxnLst/>
+              <a:rect r="r" b="b" t="t" l="l"/>
+              <a:pathLst>
+                <a:path h="812800" w="812800">
+                  <a:moveTo>
+                    <a:pt x="406400" y="0"/>
+                  </a:moveTo>
+                  <a:cubicBezTo>
+                    <a:pt x="181951" y="0"/>
+                    <a:pt x="0" y="181951"/>
+                    <a:pt x="0" y="406400"/>
+                  </a:cubicBezTo>
+                  <a:cubicBezTo>
+                    <a:pt x="0" y="630849"/>
+                    <a:pt x="181951" y="812800"/>
+                    <a:pt x="406400" y="812800"/>
+                  </a:cubicBezTo>
+                  <a:cubicBezTo>
+                    <a:pt x="630849" y="812800"/>
+                    <a:pt x="812800" y="630849"/>
+                    <a:pt x="812800" y="406400"/>
+                  </a:cubicBezTo>
+                  <a:cubicBezTo>
+                    <a:pt x="812800" y="181951"/>
+                    <a:pt x="630849" y="0"/>
+                    <a:pt x="406400" y="0"/>
+                  </a:cubicBezTo>
+                  <a:close/>
+                </a:path>
+              </a:pathLst>
+            </a:custGeom>
+            <a:solidFill>
+              <a:srgbClr val="F4F4F4"/>
+            </a:solidFill>
+            <a:ln w="19050" cap="sq">
+              <a:solidFill>
+                <a:srgbClr val="000000"/>
+              </a:solidFill>
+              <a:prstDash val="solid"/>
+              <a:miter/>
+            </a:ln>
+          </p:spPr>
+        </p:sp>
+        <p:sp>
+          <p:nvSpPr>
+            <p:cNvPr name="TextBox 15" id="15"/>
+            <p:cNvSpPr txBox="true"/>
+            <p:nvPr/>
+          </p:nvSpPr>
+          <p:spPr>
+            <a:xfrm>
+              <a:off x="76200" y="57150"/>
+              <a:ext cx="660400" cy="679450"/>
+            </a:xfrm>
+            <a:prstGeom prst="rect">
+              <a:avLst/>
+            </a:prstGeom>
+          </p:spPr>
+          <p:txBody>
+            <a:bodyPr anchor="ctr" rtlCol="false" tIns="50800" lIns="50800" bIns="50800" rIns="50800"/>
+            <a:lstStyle/>
+            <a:p>
+              <a:pPr algn="ctr">
+                <a:lnSpc>
+                  <a:spcPts val="1679"/>
+                </a:lnSpc>
+              </a:pPr>
+            </a:p>
+          </p:txBody>
+        </p:sp>
+      </p:grpSp>
+      <p:sp>
+        <p:nvSpPr>
+          <p:cNvPr name="TextBox 16" id="16"/>
           <p:cNvSpPr txBox="true"/>
           <p:nvPr/>
         </p:nvSpPr>
         <p:spPr>
           <a:xfrm rot="0">
-            <a:off x="6721849" y="3274695"/>
-            <a:ext cx="4409029" cy="3661410"/>
+            <a:off x="3161384" y="4164963"/>
+            <a:ext cx="1761231" cy="1761871"/>
           </a:xfrm>
           <a:prstGeom prst="rect">
             <a:avLst/>
@@ -6033,14 +6320,14 @@
           <a:p>
             <a:pPr algn="l" marL="0" indent="0" lvl="0">
               <a:lnSpc>
-                <a:spcPts val="13919"/>
+                <a:spcPts val="12991"/>
               </a:lnSpc>
               <a:spcBef>
                 <a:spcPct val="0"/>
               </a:spcBef>
             </a:pPr>
             <a:r>
-              <a:rPr lang="en-US" sz="12000" spc="-552">
+              <a:rPr lang="en-US" sz="11199" spc="-515">
                 <a:solidFill>
                   <a:srgbClr val="191919">
                     <a:alpha val="34902"/>
@@ -6054,27 +6341,17 @@
               <a:t>02</a:t>
             </a:r>
           </a:p>
-          <a:p>
-            <a:pPr algn="l" marL="0" indent="0" lvl="0">
-              <a:lnSpc>
-                <a:spcPts val="13919"/>
-              </a:lnSpc>
-              <a:spcBef>
-                <a:spcPct val="0"/>
-              </a:spcBef>
-            </a:pPr>
-          </a:p>
-        </p:txBody>
-      </p:sp>
-      <p:sp>
-        <p:nvSpPr>
-          <p:cNvPr name="TextBox 8" id="8"/>
+        </p:txBody>
+      </p:sp>
+      <p:sp>
+        <p:nvSpPr>
+          <p:cNvPr name="TextBox 17" id="17"/>
           <p:cNvSpPr txBox="true"/>
           <p:nvPr/>
         </p:nvSpPr>
         <p:spPr>
           <a:xfrm rot="0">
-            <a:off x="6551889" y="8015687"/>
+            <a:off x="7768575" y="5488684"/>
             <a:ext cx="3750305" cy="438150"/>
           </a:xfrm>
           <a:prstGeom prst="rect">
@@ -6140,14 +6417,14 @@
       </p:sp>
       <p:sp>
         <p:nvSpPr>
-          <p:cNvPr name="TextBox 9" id="9"/>
+          <p:cNvPr name="TextBox 18" id="18"/>
           <p:cNvSpPr txBox="true"/>
           <p:nvPr/>
         </p:nvSpPr>
         <p:spPr>
           <a:xfrm rot="0">
-            <a:off x="12414999" y="4896567"/>
-            <a:ext cx="5327346" cy="2928620"/>
+            <a:off x="7812507" y="6212267"/>
+            <a:ext cx="8644622" cy="1976120"/>
           </a:xfrm>
           <a:prstGeom prst="rect">
             <a:avLst/>
@@ -6196,14 +6473,14 @@
       </p:sp>
       <p:sp>
         <p:nvSpPr>
-          <p:cNvPr name="TextBox 10" id="10"/>
+          <p:cNvPr name="TextBox 19" id="19"/>
           <p:cNvSpPr txBox="true"/>
           <p:nvPr/>
         </p:nvSpPr>
         <p:spPr>
           <a:xfrm rot="0">
-            <a:off x="12414999" y="3211277"/>
-            <a:ext cx="4409029" cy="3661410"/>
+            <a:off x="3185323" y="6356438"/>
+            <a:ext cx="1649531" cy="1774138"/>
           </a:xfrm>
           <a:prstGeom prst="rect">
             <a:avLst/>
@@ -6217,14 +6494,14 @@
           <a:p>
             <a:pPr algn="l" marL="0" indent="0" lvl="0">
               <a:lnSpc>
-                <a:spcPts val="13919"/>
+                <a:spcPts val="13037"/>
               </a:lnSpc>
               <a:spcBef>
                 <a:spcPct val="0"/>
               </a:spcBef>
             </a:pPr>
             <a:r>
-              <a:rPr lang="en-US" sz="12000" spc="-624">
+              <a:rPr lang="en-US" sz="11238" spc="-584">
                 <a:solidFill>
                   <a:srgbClr val="191919">
                     <a:alpha val="34902"/>
@@ -6238,27 +6515,17 @@
               <a:t>03</a:t>
             </a:r>
           </a:p>
-          <a:p>
-            <a:pPr algn="l" marL="0" indent="0" lvl="0">
-              <a:lnSpc>
-                <a:spcPts val="13919"/>
-              </a:lnSpc>
-              <a:spcBef>
-                <a:spcPct val="0"/>
-              </a:spcBef>
-            </a:pPr>
-          </a:p>
-        </p:txBody>
-      </p:sp>
-      <p:sp>
-        <p:nvSpPr>
-          <p:cNvPr name="TextBox 11" id="11"/>
+        </p:txBody>
+      </p:sp>
+      <p:sp>
+        <p:nvSpPr>
+          <p:cNvPr name="TextBox 20" id="20"/>
           <p:cNvSpPr txBox="true"/>
           <p:nvPr/>
         </p:nvSpPr>
         <p:spPr>
           <a:xfrm rot="0">
-            <a:off x="12414999" y="8015687"/>
+            <a:off x="7921417" y="8369362"/>
             <a:ext cx="3750305" cy="438150"/>
           </a:xfrm>
           <a:prstGeom prst="rect">
@@ -6321,6 +6588,30 @@
             </a:r>
           </a:p>
         </p:txBody>
+      </p:sp>
+      <p:sp>
+        <p:nvSpPr>
+          <p:cNvPr name="AutoShape 21" id="21"/>
+          <p:cNvSpPr/>
+          <p:nvPr/>
+        </p:nvSpPr>
+        <p:spPr>
+          <a:xfrm>
+            <a:off x="6939220" y="1753614"/>
+            <a:ext cx="0" cy="7053897"/>
+          </a:xfrm>
+          <a:prstGeom prst="line">
+            <a:avLst/>
+          </a:prstGeom>
+          <a:ln cap="flat" w="38100">
+            <a:solidFill>
+              <a:srgbClr val="000000"/>
+            </a:solidFill>
+            <a:prstDash val="solid"/>
+            <a:headEnd type="none" len="sm" w="sm"/>
+            <a:tailEnd type="none" len="sm" w="sm"/>
+          </a:ln>
+        </p:spPr>
       </p:sp>
     </p:spTree>
   </p:cSld>
